--- a/Capstone Project-Thyroid Cancer Powerpoint.pptx
+++ b/Capstone Project-Thyroid Cancer Powerpoint.pptx
@@ -5,14 +5,15 @@
     <p:sldMasterId id="2147483660" r:id="rId1"/>
   </p:sldMasterIdLst>
   <p:sldIdLst>
-    <p:sldId id="265" r:id="rId2"/>
-    <p:sldId id="262" r:id="rId3"/>
+    <p:sldId id="267" r:id="rId2"/>
+    <p:sldId id="265" r:id="rId3"/>
     <p:sldId id="260" r:id="rId4"/>
-    <p:sldId id="259" r:id="rId5"/>
-    <p:sldId id="261" r:id="rId6"/>
-    <p:sldId id="263" r:id="rId7"/>
-    <p:sldId id="258" r:id="rId8"/>
-    <p:sldId id="264" r:id="rId9"/>
+    <p:sldId id="266" r:id="rId5"/>
+    <p:sldId id="259" r:id="rId6"/>
+    <p:sldId id="261" r:id="rId7"/>
+    <p:sldId id="263" r:id="rId8"/>
+    <p:sldId id="258" r:id="rId9"/>
+    <p:sldId id="264" r:id="rId10"/>
   </p:sldIdLst>
   <p:sldSz cx="12192000" cy="6858000"/>
   <p:notesSz cx="6858000" cy="9144000"/>
@@ -122,7 +123,7 @@
 <file path=ppt/revisionInfo.xml><?xml version="1.0" encoding="utf-8"?>
 <p1510:revInfo xmlns:a="http://schemas.openxmlformats.org/drawingml/2006/main" xmlns:r="http://schemas.openxmlformats.org/officeDocument/2006/relationships" xmlns:p1510="http://schemas.microsoft.com/office/powerpoint/2015/10/main">
   <p1510:revLst>
-    <p1510:client id="{066387A0-687D-4511-93EA-AE40F5E16F94}" v="7" dt="2026-05-25T03:50:54.039"/>
+    <p1510:client id="{066387A0-687D-4511-93EA-AE40F5E16F94}" v="6" dt="2026-05-29T17:41:00.732"/>
   </p1510:revLst>
 </p1510:revInfo>
 </file>
@@ -132,17 +133,10 @@
   <pc:docChgLst>
     <pc:chgData name="Lee, Susie" userId="979bc8aa-0e05-4b74-be8d-4d8b8edf6650" providerId="ADAL" clId="{8D32E3AD-4C24-4EC3-A286-18598D4432B9}"/>
     <pc:docChg chg="undo custSel addSld delSld modSld sldOrd">
-      <pc:chgData name="Lee, Susie" userId="979bc8aa-0e05-4b74-be8d-4d8b8edf6650" providerId="ADAL" clId="{8D32E3AD-4C24-4EC3-A286-18598D4432B9}" dt="2026-05-25T03:57:06.739" v="2540" actId="20577"/>
+      <pc:chgData name="Lee, Susie" userId="979bc8aa-0e05-4b74-be8d-4d8b8edf6650" providerId="ADAL" clId="{8D32E3AD-4C24-4EC3-A286-18598D4432B9}" dt="2026-05-29T22:00:52.073" v="3693" actId="1076"/>
       <pc:docMkLst>
         <pc:docMk/>
       </pc:docMkLst>
-      <pc:sldChg chg="addSp delSp modSp del mod ord setBg delDesignElem">
-        <pc:chgData name="Lee, Susie" userId="979bc8aa-0e05-4b74-be8d-4d8b8edf6650" providerId="ADAL" clId="{8D32E3AD-4C24-4EC3-A286-18598D4432B9}" dt="2026-05-25T03:53:02.945" v="2498" actId="2696"/>
-        <pc:sldMkLst>
-          <pc:docMk/>
-          <pc:sldMk cId="1042756777" sldId="257"/>
-        </pc:sldMkLst>
-      </pc:sldChg>
       <pc:sldChg chg="addSp delSp modSp mod setBg delDesignElem">
         <pc:chgData name="Lee, Susie" userId="979bc8aa-0e05-4b74-be8d-4d8b8edf6650" providerId="ADAL" clId="{8D32E3AD-4C24-4EC3-A286-18598D4432B9}" dt="2026-05-21T04:00:37.105" v="2315" actId="255"/>
         <pc:sldMkLst>
@@ -175,13 +169,21 @@
         </pc:picChg>
       </pc:sldChg>
       <pc:sldChg chg="addSp delSp modSp mod ord setBg delDesignElem">
-        <pc:chgData name="Lee, Susie" userId="979bc8aa-0e05-4b74-be8d-4d8b8edf6650" providerId="ADAL" clId="{8D32E3AD-4C24-4EC3-A286-18598D4432B9}" dt="2026-05-21T04:08:11.594" v="2394" actId="14100"/>
+        <pc:chgData name="Lee, Susie" userId="979bc8aa-0e05-4b74-be8d-4d8b8edf6650" providerId="ADAL" clId="{8D32E3AD-4C24-4EC3-A286-18598D4432B9}" dt="2026-05-29T21:36:51.186" v="3534" actId="20577"/>
         <pc:sldMkLst>
           <pc:docMk/>
           <pc:sldMk cId="2815806284" sldId="259"/>
         </pc:sldMkLst>
+        <pc:spChg chg="add mod">
+          <ac:chgData name="Lee, Susie" userId="979bc8aa-0e05-4b74-be8d-4d8b8edf6650" providerId="ADAL" clId="{8D32E3AD-4C24-4EC3-A286-18598D4432B9}" dt="2026-05-29T21:36:51.186" v="3534" actId="20577"/>
+          <ac:spMkLst>
+            <pc:docMk/>
+            <pc:sldMk cId="2815806284" sldId="259"/>
+            <ac:spMk id="3" creationId="{7705EEBD-6C2C-CC11-B71C-FE131A96507F}"/>
+          </ac:spMkLst>
+        </pc:spChg>
         <pc:picChg chg="add mod ord">
-          <ac:chgData name="Lee, Susie" userId="979bc8aa-0e05-4b74-be8d-4d8b8edf6650" providerId="ADAL" clId="{8D32E3AD-4C24-4EC3-A286-18598D4432B9}" dt="2026-05-21T04:08:11.594" v="2394" actId="14100"/>
+          <ac:chgData name="Lee, Susie" userId="979bc8aa-0e05-4b74-be8d-4d8b8edf6650" providerId="ADAL" clId="{8D32E3AD-4C24-4EC3-A286-18598D4432B9}" dt="2026-05-28T00:14:18.716" v="3224" actId="14100"/>
           <ac:picMkLst>
             <pc:docMk/>
             <pc:sldMk cId="2815806284" sldId="259"/>
@@ -190,7 +192,7 @@
         </pc:picChg>
       </pc:sldChg>
       <pc:sldChg chg="addSp delSp modSp new mod ord setBg delDesignElem">
-        <pc:chgData name="Lee, Susie" userId="979bc8aa-0e05-4b74-be8d-4d8b8edf6650" providerId="ADAL" clId="{8D32E3AD-4C24-4EC3-A286-18598D4432B9}" dt="2026-05-25T03:57:06.739" v="2540" actId="20577"/>
+        <pc:chgData name="Lee, Susie" userId="979bc8aa-0e05-4b74-be8d-4d8b8edf6650" providerId="ADAL" clId="{8D32E3AD-4C24-4EC3-A286-18598D4432B9}" dt="2026-05-29T21:18:38.715" v="3373"/>
         <pc:sldMkLst>
           <pc:docMk/>
           <pc:sldMk cId="3078942004" sldId="260"/>
@@ -204,7 +206,7 @@
           </ac:spMkLst>
         </pc:spChg>
         <pc:spChg chg="add mod">
-          <ac:chgData name="Lee, Susie" userId="979bc8aa-0e05-4b74-be8d-4d8b8edf6650" providerId="ADAL" clId="{8D32E3AD-4C24-4EC3-A286-18598D4432B9}" dt="2026-05-25T03:57:06.739" v="2540" actId="20577"/>
+          <ac:chgData name="Lee, Susie" userId="979bc8aa-0e05-4b74-be8d-4d8b8edf6650" providerId="ADAL" clId="{8D32E3AD-4C24-4EC3-A286-18598D4432B9}" dt="2026-05-28T00:13:11.100" v="3220" actId="20577"/>
           <ac:spMkLst>
             <pc:docMk/>
             <pc:sldMk cId="3078942004" sldId="260"/>
@@ -221,11 +223,19 @@
         </pc:cxnChg>
       </pc:sldChg>
       <pc:sldChg chg="addSp delSp modSp new mod ord setBg delDesignElem">
-        <pc:chgData name="Lee, Susie" userId="979bc8aa-0e05-4b74-be8d-4d8b8edf6650" providerId="ADAL" clId="{8D32E3AD-4C24-4EC3-A286-18598D4432B9}" dt="2026-05-25T03:03:13.549" v="2399"/>
+        <pc:chgData name="Lee, Susie" userId="979bc8aa-0e05-4b74-be8d-4d8b8edf6650" providerId="ADAL" clId="{8D32E3AD-4C24-4EC3-A286-18598D4432B9}" dt="2026-05-29T21:46:59.799" v="3566" actId="20577"/>
         <pc:sldMkLst>
           <pc:docMk/>
           <pc:sldMk cId="4126133397" sldId="261"/>
         </pc:sldMkLst>
+        <pc:spChg chg="add mod">
+          <ac:chgData name="Lee, Susie" userId="979bc8aa-0e05-4b74-be8d-4d8b8edf6650" providerId="ADAL" clId="{8D32E3AD-4C24-4EC3-A286-18598D4432B9}" dt="2026-05-29T21:46:59.799" v="3566" actId="20577"/>
+          <ac:spMkLst>
+            <pc:docMk/>
+            <pc:sldMk cId="4126133397" sldId="261"/>
+            <ac:spMk id="3" creationId="{40E665E4-FFCF-BF1C-4C89-8F1AB5733181}"/>
+          </ac:spMkLst>
+        </pc:spChg>
         <pc:spChg chg="add">
           <ac:chgData name="Lee, Susie" userId="979bc8aa-0e05-4b74-be8d-4d8b8edf6650" providerId="ADAL" clId="{8D32E3AD-4C24-4EC3-A286-18598D4432B9}" dt="2026-05-21T04:01:59.537" v="2321" actId="26606"/>
           <ac:spMkLst>
@@ -259,7 +269,7 @@
           </ac:grpSpMkLst>
         </pc:grpChg>
         <pc:picChg chg="add mod ord">
-          <ac:chgData name="Lee, Susie" userId="979bc8aa-0e05-4b74-be8d-4d8b8edf6650" providerId="ADAL" clId="{8D32E3AD-4C24-4EC3-A286-18598D4432B9}" dt="2026-05-21T04:02:29.722" v="2329" actId="1076"/>
+          <ac:chgData name="Lee, Susie" userId="979bc8aa-0e05-4b74-be8d-4d8b8edf6650" providerId="ADAL" clId="{8D32E3AD-4C24-4EC3-A286-18598D4432B9}" dt="2026-05-29T21:42:56.768" v="3546" actId="1076"/>
           <ac:picMkLst>
             <pc:docMk/>
             <pc:sldMk cId="4126133397" sldId="261"/>
@@ -267,7 +277,7 @@
           </ac:picMkLst>
         </pc:picChg>
         <pc:picChg chg="add mod">
-          <ac:chgData name="Lee, Susie" userId="979bc8aa-0e05-4b74-be8d-4d8b8edf6650" providerId="ADAL" clId="{8D32E3AD-4C24-4EC3-A286-18598D4432B9}" dt="2026-05-21T04:02:26.990" v="2328" actId="1076"/>
+          <ac:chgData name="Lee, Susie" userId="979bc8aa-0e05-4b74-be8d-4d8b8edf6650" providerId="ADAL" clId="{8D32E3AD-4C24-4EC3-A286-18598D4432B9}" dt="2026-05-29T21:41:45.810" v="3537" actId="1076"/>
           <ac:picMkLst>
             <pc:docMk/>
             <pc:sldMk cId="4126133397" sldId="261"/>
@@ -283,39 +293,31 @@
           </ac:cxnSpMkLst>
         </pc:cxnChg>
       </pc:sldChg>
-      <pc:sldChg chg="addSp delSp modSp new mod setBg modAnim delDesignElem">
-        <pc:chgData name="Lee, Susie" userId="979bc8aa-0e05-4b74-be8d-4d8b8edf6650" providerId="ADAL" clId="{8D32E3AD-4C24-4EC3-A286-18598D4432B9}" dt="2026-05-25T03:53:39.950" v="2518" actId="20577"/>
+      <pc:sldChg chg="addSp delSp modSp new del mod ord setBg modAnim delDesignElem">
+        <pc:chgData name="Lee, Susie" userId="979bc8aa-0e05-4b74-be8d-4d8b8edf6650" providerId="ADAL" clId="{8D32E3AD-4C24-4EC3-A286-18598D4432B9}" dt="2026-05-29T17:31:56.857" v="3322" actId="2696"/>
         <pc:sldMkLst>
           <pc:docMk/>
           <pc:sldMk cId="4232496392" sldId="262"/>
         </pc:sldMkLst>
-        <pc:spChg chg="mod ord">
-          <ac:chgData name="Lee, Susie" userId="979bc8aa-0e05-4b74-be8d-4d8b8edf6650" providerId="ADAL" clId="{8D32E3AD-4C24-4EC3-A286-18598D4432B9}" dt="2026-05-21T03:18:58.081" v="1608" actId="27636"/>
+        <pc:spChg chg="add mod">
+          <ac:chgData name="Lee, Susie" userId="979bc8aa-0e05-4b74-be8d-4d8b8edf6650" providerId="ADAL" clId="{8D32E3AD-4C24-4EC3-A286-18598D4432B9}" dt="2026-05-29T17:31:16.955" v="3319" actId="21"/>
           <ac:spMkLst>
             <pc:docMk/>
             <pc:sldMk cId="4232496392" sldId="262"/>
-            <ac:spMk id="2" creationId="{2D934CC8-D380-A21D-7849-4154F947F349}"/>
+            <ac:spMk id="4" creationId="{FC1AA721-8474-EF11-833A-6AE17D909285}"/>
           </ac:spMkLst>
         </pc:spChg>
-        <pc:graphicFrameChg chg="add mod ord modGraphic">
-          <ac:chgData name="Lee, Susie" userId="979bc8aa-0e05-4b74-be8d-4d8b8edf6650" providerId="ADAL" clId="{8D32E3AD-4C24-4EC3-A286-18598D4432B9}" dt="2026-05-25T03:53:39.950" v="2518" actId="20577"/>
+        <pc:graphicFrameChg chg="add del mod ord modGraphic">
+          <ac:chgData name="Lee, Susie" userId="979bc8aa-0e05-4b74-be8d-4d8b8edf6650" providerId="ADAL" clId="{8D32E3AD-4C24-4EC3-A286-18598D4432B9}" dt="2026-05-29T17:31:16.955" v="3319" actId="21"/>
           <ac:graphicFrameMkLst>
             <pc:docMk/>
             <pc:sldMk cId="4232496392" sldId="262"/>
             <ac:graphicFrameMk id="19" creationId="{C0AC782E-24C0-542D-36C9-8F261BAE0AE9}"/>
           </ac:graphicFrameMkLst>
         </pc:graphicFrameChg>
-        <pc:picChg chg="add mod">
-          <ac:chgData name="Lee, Susie" userId="979bc8aa-0e05-4b74-be8d-4d8b8edf6650" providerId="ADAL" clId="{8D32E3AD-4C24-4EC3-A286-18598D4432B9}" dt="2026-05-21T03:09:59.700" v="1577" actId="26606"/>
-          <ac:picMkLst>
-            <pc:docMk/>
-            <pc:sldMk cId="4232496392" sldId="262"/>
-            <ac:picMk id="6" creationId="{AD0B169C-989B-1357-3734-87AA22B9CF12}"/>
-          </ac:picMkLst>
-        </pc:picChg>
       </pc:sldChg>
       <pc:sldChg chg="addSp delSp modSp new mod ord setBg delDesignElem">
-        <pc:chgData name="Lee, Susie" userId="979bc8aa-0e05-4b74-be8d-4d8b8edf6650" providerId="ADAL" clId="{8D32E3AD-4C24-4EC3-A286-18598D4432B9}" dt="2026-05-25T03:03:08.999" v="2397"/>
+        <pc:chgData name="Lee, Susie" userId="979bc8aa-0e05-4b74-be8d-4d8b8edf6650" providerId="ADAL" clId="{8D32E3AD-4C24-4EC3-A286-18598D4432B9}" dt="2026-05-29T21:58:50.270" v="3690" actId="12"/>
         <pc:sldMkLst>
           <pc:docMk/>
           <pc:sldMk cId="1636456439" sldId="263"/>
@@ -329,7 +331,7 @@
           </ac:spMkLst>
         </pc:spChg>
         <pc:spChg chg="add mod ord">
-          <ac:chgData name="Lee, Susie" userId="979bc8aa-0e05-4b74-be8d-4d8b8edf6650" providerId="ADAL" clId="{8D32E3AD-4C24-4EC3-A286-18598D4432B9}" dt="2026-05-21T04:04:34.373" v="2353" actId="255"/>
+          <ac:chgData name="Lee, Susie" userId="979bc8aa-0e05-4b74-be8d-4d8b8edf6650" providerId="ADAL" clId="{8D32E3AD-4C24-4EC3-A286-18598D4432B9}" dt="2026-05-29T21:58:50.270" v="3690" actId="12"/>
           <ac:spMkLst>
             <pc:docMk/>
             <pc:sldMk cId="1636456439" sldId="263"/>
@@ -354,13 +356,13 @@
         </pc:picChg>
       </pc:sldChg>
       <pc:sldChg chg="modSp new mod ord">
-        <pc:chgData name="Lee, Susie" userId="979bc8aa-0e05-4b74-be8d-4d8b8edf6650" providerId="ADAL" clId="{8D32E3AD-4C24-4EC3-A286-18598D4432B9}" dt="2026-05-21T03:47:43.515" v="1816" actId="14100"/>
+        <pc:chgData name="Lee, Susie" userId="979bc8aa-0e05-4b74-be8d-4d8b8edf6650" providerId="ADAL" clId="{8D32E3AD-4C24-4EC3-A286-18598D4432B9}" dt="2026-05-29T21:59:55.106" v="3691" actId="1076"/>
         <pc:sldMkLst>
           <pc:docMk/>
           <pc:sldMk cId="876519983" sldId="264"/>
         </pc:sldMkLst>
         <pc:spChg chg="mod">
-          <ac:chgData name="Lee, Susie" userId="979bc8aa-0e05-4b74-be8d-4d8b8edf6650" providerId="ADAL" clId="{8D32E3AD-4C24-4EC3-A286-18598D4432B9}" dt="2026-05-21T03:18:57.858" v="1604"/>
+          <ac:chgData name="Lee, Susie" userId="979bc8aa-0e05-4b74-be8d-4d8b8edf6650" providerId="ADAL" clId="{8D32E3AD-4C24-4EC3-A286-18598D4432B9}" dt="2026-05-29T21:59:55.106" v="3691" actId="1076"/>
           <ac:spMkLst>
             <pc:docMk/>
             <pc:sldMk cId="876519983" sldId="264"/>
@@ -376,8 +378,8 @@
           </ac:spMkLst>
         </pc:spChg>
       </pc:sldChg>
-      <pc:sldChg chg="addSp modSp new mod setBg">
-        <pc:chgData name="Lee, Susie" userId="979bc8aa-0e05-4b74-be8d-4d8b8edf6650" providerId="ADAL" clId="{8D32E3AD-4C24-4EC3-A286-18598D4432B9}" dt="2026-05-25T03:52:22.725" v="2497" actId="14100"/>
+      <pc:sldChg chg="addSp modSp new mod ord setBg">
+        <pc:chgData name="Lee, Susie" userId="979bc8aa-0e05-4b74-be8d-4d8b8edf6650" providerId="ADAL" clId="{8D32E3AD-4C24-4EC3-A286-18598D4432B9}" dt="2026-05-29T17:41:20.465" v="3371" actId="27636"/>
         <pc:sldMkLst>
           <pc:docMk/>
           <pc:sldMk cId="156554742" sldId="265"/>
@@ -391,7 +393,7 @@
           </ac:spMkLst>
         </pc:spChg>
         <pc:spChg chg="mod">
-          <ac:chgData name="Lee, Susie" userId="979bc8aa-0e05-4b74-be8d-4d8b8edf6650" providerId="ADAL" clId="{8D32E3AD-4C24-4EC3-A286-18598D4432B9}" dt="2026-05-25T03:51:16.227" v="2490" actId="26606"/>
+          <ac:chgData name="Lee, Susie" userId="979bc8aa-0e05-4b74-be8d-4d8b8edf6650" providerId="ADAL" clId="{8D32E3AD-4C24-4EC3-A286-18598D4432B9}" dt="2026-05-29T17:41:20.465" v="3371" actId="27636"/>
           <ac:spMkLst>
             <pc:docMk/>
             <pc:sldMk cId="156554742" sldId="265"/>
@@ -444,6 +446,92 @@
             <pc:docMk/>
             <pc:sldMk cId="156554742" sldId="265"/>
             <ac:picMk id="5" creationId="{2C6C8245-50A7-DD05-1E5E-2495F335BCBC}"/>
+          </ac:picMkLst>
+        </pc:picChg>
+      </pc:sldChg>
+      <pc:sldChg chg="addSp delSp modSp new mod ord">
+        <pc:chgData name="Lee, Susie" userId="979bc8aa-0e05-4b74-be8d-4d8b8edf6650" providerId="ADAL" clId="{8D32E3AD-4C24-4EC3-A286-18598D4432B9}" dt="2026-05-29T22:00:52.073" v="3693" actId="1076"/>
+        <pc:sldMkLst>
+          <pc:docMk/>
+          <pc:sldMk cId="522361943" sldId="266"/>
+        </pc:sldMkLst>
+        <pc:spChg chg="mod">
+          <ac:chgData name="Lee, Susie" userId="979bc8aa-0e05-4b74-be8d-4d8b8edf6650" providerId="ADAL" clId="{8D32E3AD-4C24-4EC3-A286-18598D4432B9}" dt="2026-05-28T00:00:50.166" v="3204" actId="14100"/>
+          <ac:spMkLst>
+            <pc:docMk/>
+            <pc:sldMk cId="522361943" sldId="266"/>
+            <ac:spMk id="2" creationId="{15268FD2-EDE1-C5D9-53B7-6B385E5C56D4}"/>
+          </ac:spMkLst>
+        </pc:spChg>
+        <pc:spChg chg="mod">
+          <ac:chgData name="Lee, Susie" userId="979bc8aa-0e05-4b74-be8d-4d8b8edf6650" providerId="ADAL" clId="{8D32E3AD-4C24-4EC3-A286-18598D4432B9}" dt="2026-05-27T23:59:04.125" v="3191" actId="1076"/>
+          <ac:spMkLst>
+            <pc:docMk/>
+            <pc:sldMk cId="522361943" sldId="266"/>
+            <ac:spMk id="3" creationId="{574EB1DF-1398-B509-8789-8D0E9F05A61B}"/>
+          </ac:spMkLst>
+        </pc:spChg>
+        <pc:spChg chg="add mod">
+          <ac:chgData name="Lee, Susie" userId="979bc8aa-0e05-4b74-be8d-4d8b8edf6650" providerId="ADAL" clId="{8D32E3AD-4C24-4EC3-A286-18598D4432B9}" dt="2026-05-27T23:58:32.861" v="3184" actId="1076"/>
+          <ac:spMkLst>
+            <pc:docMk/>
+            <pc:sldMk cId="522361943" sldId="266"/>
+            <ac:spMk id="13" creationId="{BBC4CAB3-F003-DFAE-AA7E-9DFDB4669D56}"/>
+          </ac:spMkLst>
+        </pc:spChg>
+        <pc:picChg chg="add mod">
+          <ac:chgData name="Lee, Susie" userId="979bc8aa-0e05-4b74-be8d-4d8b8edf6650" providerId="ADAL" clId="{8D32E3AD-4C24-4EC3-A286-18598D4432B9}" dt="2026-05-29T22:00:52.073" v="3693" actId="1076"/>
+          <ac:picMkLst>
+            <pc:docMk/>
+            <pc:sldMk cId="522361943" sldId="266"/>
+            <ac:picMk id="5" creationId="{5342CD38-5956-7477-8BC1-BBAD4E925D92}"/>
+          </ac:picMkLst>
+        </pc:picChg>
+        <pc:picChg chg="add mod">
+          <ac:chgData name="Lee, Susie" userId="979bc8aa-0e05-4b74-be8d-4d8b8edf6650" providerId="ADAL" clId="{8D32E3AD-4C24-4EC3-A286-18598D4432B9}" dt="2026-05-27T23:58:29.213" v="3183" actId="1076"/>
+          <ac:picMkLst>
+            <pc:docMk/>
+            <pc:sldMk cId="522361943" sldId="266"/>
+            <ac:picMk id="11" creationId="{F2E32E82-62B1-3336-F067-7FC02AA9994B}"/>
+          </ac:picMkLst>
+        </pc:picChg>
+      </pc:sldChg>
+      <pc:sldChg chg="addSp delSp modSp new mod ord">
+        <pc:chgData name="Lee, Susie" userId="979bc8aa-0e05-4b74-be8d-4d8b8edf6650" providerId="ADAL" clId="{8D32E3AD-4C24-4EC3-A286-18598D4432B9}" dt="2026-05-29T17:32:02.980" v="3323" actId="1076"/>
+        <pc:sldMkLst>
+          <pc:docMk/>
+          <pc:sldMk cId="3024302874" sldId="267"/>
+        </pc:sldMkLst>
+        <pc:spChg chg="mod">
+          <ac:chgData name="Lee, Susie" userId="979bc8aa-0e05-4b74-be8d-4d8b8edf6650" providerId="ADAL" clId="{8D32E3AD-4C24-4EC3-A286-18598D4432B9}" dt="2026-05-29T17:10:07.638" v="3316"/>
+          <ac:spMkLst>
+            <pc:docMk/>
+            <pc:sldMk cId="3024302874" sldId="267"/>
+            <ac:spMk id="2" creationId="{CB5E6147-BC5C-7CF5-D131-537385E355E0}"/>
+          </ac:spMkLst>
+        </pc:spChg>
+        <pc:spChg chg="del">
+          <ac:chgData name="Lee, Susie" userId="979bc8aa-0e05-4b74-be8d-4d8b8edf6650" providerId="ADAL" clId="{8D32E3AD-4C24-4EC3-A286-18598D4432B9}" dt="2026-05-29T17:29:17.875" v="3317" actId="22"/>
+          <ac:spMkLst>
+            <pc:docMk/>
+            <pc:sldMk cId="3024302874" sldId="267"/>
+            <ac:spMk id="3" creationId="{68F06A50-97E7-A998-9F05-175E1AFCA023}"/>
+          </ac:spMkLst>
+        </pc:spChg>
+        <pc:graphicFrameChg chg="add mod">
+          <ac:chgData name="Lee, Susie" userId="979bc8aa-0e05-4b74-be8d-4d8b8edf6650" providerId="ADAL" clId="{8D32E3AD-4C24-4EC3-A286-18598D4432B9}" dt="2026-05-29T17:31:27.155" v="3321" actId="1076"/>
+          <ac:graphicFrameMkLst>
+            <pc:docMk/>
+            <pc:sldMk cId="3024302874" sldId="267"/>
+            <ac:graphicFrameMk id="19" creationId="{C0AC782E-24C0-542D-36C9-8F261BAE0AE9}"/>
+          </ac:graphicFrameMkLst>
+        </pc:graphicFrameChg>
+        <pc:picChg chg="add mod ord">
+          <ac:chgData name="Lee, Susie" userId="979bc8aa-0e05-4b74-be8d-4d8b8edf6650" providerId="ADAL" clId="{8D32E3AD-4C24-4EC3-A286-18598D4432B9}" dt="2026-05-29T17:32:02.980" v="3323" actId="1076"/>
+          <ac:picMkLst>
+            <pc:docMk/>
+            <pc:sldMk cId="3024302874" sldId="267"/>
+            <ac:picMk id="5" creationId="{649D976D-34F6-378F-CE0E-4D27470CC306}"/>
           </ac:picMkLst>
         </pc:picChg>
       </pc:sldChg>
@@ -1259,7 +1347,7 @@
         <a:lstStyle/>
         <a:p>
           <a:r>
-            <a:rPr lang="en-US"/>
+            <a:rPr lang="en-US" dirty="0"/>
             <a:t>What are the risk factors contributing to thyroid cancer and which one have the highest chance that led to thyroid cancer?</a:t>
           </a:r>
         </a:p>
@@ -1501,7 +1589,7 @@
   <dgm:whole/>
   <dgm:extLst>
     <a:ext uri="http://schemas.microsoft.com/office/drawing/2008/diagram">
-      <dsp:dataModelExt xmlns:dsp="http://schemas.microsoft.com/office/drawing/2008/diagram" relId="rId6" minVer="http://schemas.openxmlformats.org/drawingml/2006/diagram"/>
+      <dsp:dataModelExt xmlns:dsp="http://schemas.microsoft.com/office/drawing/2008/diagram" relId="rId7" minVer="http://schemas.openxmlformats.org/drawingml/2006/diagram"/>
     </a:ext>
   </dgm:extLst>
 </dgm:dataModel>
@@ -1723,7 +1811,7 @@
             <a:buNone/>
           </a:pPr>
           <a:r>
-            <a:rPr lang="en-US" sz="1200" kern="1200"/>
+            <a:rPr lang="en-US" sz="1200" kern="1200" dirty="0"/>
             <a:t>What are the risk factors contributing to thyroid cancer and which one have the highest chance that led to thyroid cancer?</a:t>
           </a:r>
         </a:p>
@@ -3790,7 +3878,7 @@
           <a:p>
             <a:fld id="{CC1DD848-C12A-43A2-A9F1-9F3D864B7FFC}" type="datetimeFigureOut">
               <a:rPr lang="en-US" smtClean="0"/>
-              <a:t>5/24/2026</a:t>
+              <a:t>5/29/2026</a:t>
             </a:fld>
             <a:endParaRPr lang="en-US"/>
           </a:p>
@@ -4041,7 +4129,7 @@
           <a:p>
             <a:fld id="{CC1DD848-C12A-43A2-A9F1-9F3D864B7FFC}" type="datetimeFigureOut">
               <a:rPr lang="en-US" smtClean="0"/>
-              <a:t>5/24/2026</a:t>
+              <a:t>5/29/2026</a:t>
             </a:fld>
             <a:endParaRPr lang="en-US"/>
           </a:p>
@@ -4355,7 +4443,7 @@
           <a:p>
             <a:fld id="{CC1DD848-C12A-43A2-A9F1-9F3D864B7FFC}" type="datetimeFigureOut">
               <a:rPr lang="en-US" smtClean="0"/>
-              <a:t>5/24/2026</a:t>
+              <a:t>5/29/2026</a:t>
             </a:fld>
             <a:endParaRPr lang="en-US"/>
           </a:p>
@@ -4696,7 +4784,7 @@
           <a:p>
             <a:fld id="{CC1DD848-C12A-43A2-A9F1-9F3D864B7FFC}" type="datetimeFigureOut">
               <a:rPr lang="en-US" smtClean="0"/>
-              <a:t>5/24/2026</a:t>
+              <a:t>5/29/2026</a:t>
             </a:fld>
             <a:endParaRPr lang="en-US"/>
           </a:p>
@@ -5010,7 +5098,7 @@
           <a:p>
             <a:fld id="{CC1DD848-C12A-43A2-A9F1-9F3D864B7FFC}" type="datetimeFigureOut">
               <a:rPr lang="en-US" smtClean="0"/>
-              <a:t>5/24/2026</a:t>
+              <a:t>5/29/2026</a:t>
             </a:fld>
             <a:endParaRPr lang="en-US"/>
           </a:p>
@@ -5403,7 +5491,7 @@
           <a:p>
             <a:fld id="{CC1DD848-C12A-43A2-A9F1-9F3D864B7FFC}" type="datetimeFigureOut">
               <a:rPr lang="en-US" smtClean="0"/>
-              <a:t>5/24/2026</a:t>
+              <a:t>5/29/2026</a:t>
             </a:fld>
             <a:endParaRPr lang="en-US"/>
           </a:p>
@@ -5573,7 +5661,7 @@
           <a:p>
             <a:fld id="{CC1DD848-C12A-43A2-A9F1-9F3D864B7FFC}" type="datetimeFigureOut">
               <a:rPr lang="en-US" smtClean="0"/>
-              <a:t>5/24/2026</a:t>
+              <a:t>5/29/2026</a:t>
             </a:fld>
             <a:endParaRPr lang="en-US"/>
           </a:p>
@@ -5753,7 +5841,7 @@
           <a:p>
             <a:fld id="{CC1DD848-C12A-43A2-A9F1-9F3D864B7FFC}" type="datetimeFigureOut">
               <a:rPr lang="en-US" smtClean="0"/>
-              <a:t>5/24/2026</a:t>
+              <a:t>5/29/2026</a:t>
             </a:fld>
             <a:endParaRPr lang="en-US"/>
           </a:p>
@@ -5929,7 +6017,7 @@
           <a:p>
             <a:fld id="{CC1DD848-C12A-43A2-A9F1-9F3D864B7FFC}" type="datetimeFigureOut">
               <a:rPr lang="en-US" smtClean="0"/>
-              <a:t>5/24/2026</a:t>
+              <a:t>5/29/2026</a:t>
             </a:fld>
             <a:endParaRPr lang="en-US"/>
           </a:p>
@@ -6176,7 +6264,7 @@
           <a:p>
             <a:fld id="{CC1DD848-C12A-43A2-A9F1-9F3D864B7FFC}" type="datetimeFigureOut">
               <a:rPr lang="en-US" smtClean="0"/>
-              <a:t>5/24/2026</a:t>
+              <a:t>5/29/2026</a:t>
             </a:fld>
             <a:endParaRPr lang="en-US"/>
           </a:p>
@@ -6408,7 +6496,7 @@
           <a:p>
             <a:fld id="{CC1DD848-C12A-43A2-A9F1-9F3D864B7FFC}" type="datetimeFigureOut">
               <a:rPr lang="en-US" smtClean="0"/>
-              <a:t>5/24/2026</a:t>
+              <a:t>5/29/2026</a:t>
             </a:fld>
             <a:endParaRPr lang="en-US"/>
           </a:p>
@@ -6782,7 +6870,7 @@
           <a:p>
             <a:fld id="{CC1DD848-C12A-43A2-A9F1-9F3D864B7FFC}" type="datetimeFigureOut">
               <a:rPr lang="en-US" smtClean="0"/>
-              <a:t>5/24/2026</a:t>
+              <a:t>5/29/2026</a:t>
             </a:fld>
             <a:endParaRPr lang="en-US"/>
           </a:p>
@@ -6905,7 +6993,7 @@
           <a:p>
             <a:fld id="{CC1DD848-C12A-43A2-A9F1-9F3D864B7FFC}" type="datetimeFigureOut">
               <a:rPr lang="en-US" smtClean="0"/>
-              <a:t>5/24/2026</a:t>
+              <a:t>5/29/2026</a:t>
             </a:fld>
             <a:endParaRPr lang="en-US"/>
           </a:p>
@@ -7000,7 +7088,7 @@
           <a:p>
             <a:fld id="{CC1DD848-C12A-43A2-A9F1-9F3D864B7FFC}" type="datetimeFigureOut">
               <a:rPr lang="en-US" smtClean="0"/>
-              <a:t>5/24/2026</a:t>
+              <a:t>5/29/2026</a:t>
             </a:fld>
             <a:endParaRPr lang="en-US"/>
           </a:p>
@@ -7255,7 +7343,7 @@
           <a:p>
             <a:fld id="{CC1DD848-C12A-43A2-A9F1-9F3D864B7FFC}" type="datetimeFigureOut">
               <a:rPr lang="en-US" smtClean="0"/>
-              <a:t>5/24/2026</a:t>
+              <a:t>5/29/2026</a:t>
             </a:fld>
             <a:endParaRPr lang="en-US"/>
           </a:p>
@@ -7518,7 +7606,7 @@
           <a:p>
             <a:fld id="{CC1DD848-C12A-43A2-A9F1-9F3D864B7FFC}" type="datetimeFigureOut">
               <a:rPr lang="en-US" smtClean="0"/>
-              <a:t>5/24/2026</a:t>
+              <a:t>5/29/2026</a:t>
             </a:fld>
             <a:endParaRPr lang="en-US"/>
           </a:p>
@@ -8317,7 +8405,7 @@
           <a:p>
             <a:fld id="{CC1DD848-C12A-43A2-A9F1-9F3D864B7FFC}" type="datetimeFigureOut">
               <a:rPr lang="en-US" smtClean="0"/>
-              <a:t>5/24/2026</a:t>
+              <a:t>5/29/2026</a:t>
             </a:fld>
             <a:endParaRPr lang="en-US"/>
           </a:p>
@@ -8827,6 +8915,126 @@
 <file path=ppt/slides/slide1.xml><?xml version="1.0" encoding="utf-8"?>
 <p:sld xmlns:a="http://schemas.openxmlformats.org/drawingml/2006/main" xmlns:r="http://schemas.openxmlformats.org/officeDocument/2006/relationships" xmlns:p="http://schemas.openxmlformats.org/presentationml/2006/main">
   <p:cSld>
+    <p:spTree>
+      <p:nvGrpSpPr>
+        <p:cNvPr id="1" name=""/>
+        <p:cNvGrpSpPr/>
+        <p:nvPr/>
+      </p:nvGrpSpPr>
+      <p:grpSpPr>
+        <a:xfrm>
+          <a:off x="0" y="0"/>
+          <a:ext cx="0" cy="0"/>
+          <a:chOff x="0" y="0"/>
+          <a:chExt cx="0" cy="0"/>
+        </a:xfrm>
+      </p:grpSpPr>
+      <p:sp>
+        <p:nvSpPr>
+          <p:cNvPr id="2" name="Title 1">
+            <a:extLst>
+              <a:ext uri="{FF2B5EF4-FFF2-40B4-BE49-F238E27FC236}">
+                <a16:creationId xmlns:a16="http://schemas.microsoft.com/office/drawing/2014/main" id="{CB5E6147-BC5C-7CF5-D131-537385E355E0}"/>
+              </a:ext>
+            </a:extLst>
+          </p:cNvPr>
+          <p:cNvSpPr>
+            <a:spLocks noGrp="1"/>
+          </p:cNvSpPr>
+          <p:nvPr>
+            <p:ph type="title"/>
+          </p:nvPr>
+        </p:nvSpPr>
+        <p:spPr/>
+        <p:txBody>
+          <a:bodyPr/>
+          <a:lstStyle/>
+          <a:p>
+            <a:r>
+              <a:rPr lang="en-US" dirty="0"/>
+              <a:t>What is Thyroid Cancer and their risk factors?</a:t>
+            </a:r>
+          </a:p>
+        </p:txBody>
+      </p:sp>
+      <p:pic>
+        <p:nvPicPr>
+          <p:cNvPr id="5" name="Content Placeholder 4">
+            <a:extLst>
+              <a:ext uri="{FF2B5EF4-FFF2-40B4-BE49-F238E27FC236}">
+                <a16:creationId xmlns:a16="http://schemas.microsoft.com/office/drawing/2014/main" id="{649D976D-34F6-378F-CE0E-4D27470CC306}"/>
+              </a:ext>
+            </a:extLst>
+          </p:cNvPr>
+          <p:cNvPicPr>
+            <a:picLocks noGrp="1" noChangeAspect="1"/>
+          </p:cNvPicPr>
+          <p:nvPr>
+            <p:ph idx="1"/>
+          </p:nvPr>
+        </p:nvPicPr>
+        <p:blipFill>
+          <a:blip r:embed="rId2"/>
+          <a:stretch>
+            <a:fillRect/>
+          </a:stretch>
+        </p:blipFill>
+        <p:spPr>
+          <a:xfrm>
+            <a:off x="455378" y="2006600"/>
+            <a:ext cx="3184768" cy="3881437"/>
+          </a:xfrm>
+          <a:prstGeom prst="rect">
+            <a:avLst/>
+          </a:prstGeom>
+        </p:spPr>
+      </p:pic>
+      <p:graphicFrame>
+        <p:nvGraphicFramePr>
+          <p:cNvPr id="19" name="Content Placeholder 2">
+            <a:extLst>
+              <a:ext uri="{FF2B5EF4-FFF2-40B4-BE49-F238E27FC236}">
+                <a16:creationId xmlns:a16="http://schemas.microsoft.com/office/drawing/2014/main" id="{C0AC782E-24C0-542D-36C9-8F261BAE0AE9}"/>
+              </a:ext>
+            </a:extLst>
+          </p:cNvPr>
+          <p:cNvGraphicFramePr>
+            <a:graphicFrameLocks/>
+          </p:cNvGraphicFramePr>
+          <p:nvPr>
+            <p:extLst>
+              <p:ext uri="{D42A27DB-BD31-4B8C-83A1-F6EECF244321}">
+                <p14:modId xmlns:p14="http://schemas.microsoft.com/office/powerpoint/2010/main" val="271075301"/>
+              </p:ext>
+            </p:extLst>
+          </p:nvPr>
+        </p:nvGraphicFramePr>
+        <p:xfrm>
+          <a:off x="3862102" y="1458686"/>
+          <a:ext cx="5627914" cy="5627914"/>
+        </p:xfrm>
+        <a:graphic>
+          <a:graphicData uri="http://schemas.openxmlformats.org/drawingml/2006/diagram">
+            <dgm:relIds xmlns:dgm="http://schemas.openxmlformats.org/drawingml/2006/diagram" xmlns:r="http://schemas.openxmlformats.org/officeDocument/2006/relationships" r:dm="rId3" r:lo="rId4" r:qs="rId5" r:cs="rId6"/>
+          </a:graphicData>
+        </a:graphic>
+      </p:graphicFrame>
+    </p:spTree>
+    <p:extLst>
+      <p:ext uri="{BB962C8B-B14F-4D97-AF65-F5344CB8AC3E}">
+        <p14:creationId xmlns:p14="http://schemas.microsoft.com/office/powerpoint/2010/main" val="3024302874"/>
+      </p:ext>
+    </p:extLst>
+  </p:cSld>
+  <p:clrMapOvr>
+    <a:masterClrMapping/>
+  </p:clrMapOvr>
+</p:sld>
+</file>
+
+<file path=ppt/slides/slide2.xml><?xml version="1.0" encoding="utf-8"?>
+<p:sld xmlns:a="http://schemas.openxmlformats.org/drawingml/2006/main" xmlns:r="http://schemas.openxmlformats.org/officeDocument/2006/relationships" xmlns:p="http://schemas.openxmlformats.org/presentationml/2006/main">
+  <p:cSld>
     <p:bg>
       <p:bgPr>
         <a:solidFill>
@@ -9077,7 +9285,7 @@
               </a:lnSpc>
             </a:pPr>
             <a:r>
-              <a:rPr lang="en-US" sz="3200"/>
+              <a:rPr lang="en-US" sz="3200" dirty="0"/>
               <a:t>What is Thyroid Cancer and their risk factors?</a:t>
             </a:r>
           </a:p>
@@ -9167,28 +9375,97 @@
         <p:spPr>
           <a:xfrm>
             <a:off x="677334" y="2795618"/>
-            <a:ext cx="3749061" cy="3005289"/>
+            <a:ext cx="4721980" cy="3616068"/>
           </a:xfrm>
         </p:spPr>
         <p:txBody>
           <a:bodyPr>
-            <a:normAutofit/>
+            <a:normAutofit fontScale="92500"/>
           </a:bodyPr>
           <a:lstStyle/>
           <a:p>
             <a:r>
-              <a:rPr lang="en-US" sz="1600"/>
+              <a:rPr lang="en-US" sz="1600" dirty="0">
+                <a:latin typeface="Calibri" panose="020F0502020204030204" pitchFamily="34" charset="0"/>
+                <a:ea typeface="Calibri" panose="020F0502020204030204" pitchFamily="34" charset="0"/>
+                <a:cs typeface="Calibri" panose="020F0502020204030204" pitchFamily="34" charset="0"/>
+              </a:rPr>
               <a:t>Thyroid cancer occurs when DNA mutations cause cells in the thyroid to grow uncontrollably. The type of cancer depends on which cells mutate. There is no clear consensus on what causes these changes, but several risk factors have been associated with a higher chance of developing thyroid cancer.</a:t>
             </a:r>
           </a:p>
           <a:p>
             <a:r>
-              <a:rPr lang="en-US" sz="1600"/>
-              <a:t>These risk factors include:</a:t>
-            </a:r>
-          </a:p>
-          <a:p>
-            <a:endParaRPr lang="en-US" sz="1600"/>
+              <a:rPr lang="en-US" sz="1600" dirty="0">
+                <a:latin typeface="Calibri" panose="020F0502020204030204" pitchFamily="34" charset="0"/>
+                <a:ea typeface="Calibri" panose="020F0502020204030204" pitchFamily="34" charset="0"/>
+                <a:cs typeface="Calibri" panose="020F0502020204030204" pitchFamily="34" charset="0"/>
+              </a:rPr>
+              <a:t>RISK FACTORS for thyroid cancer includes: </a:t>
+            </a:r>
+          </a:p>
+          <a:p>
+            <a:r>
+              <a:rPr lang="en-US" sz="1600" dirty="0">
+                <a:latin typeface="Calibri" panose="020F0502020204030204" pitchFamily="34" charset="0"/>
+                <a:ea typeface="Calibri" panose="020F0502020204030204" pitchFamily="34" charset="0"/>
+                <a:cs typeface="Calibri" panose="020F0502020204030204" pitchFamily="34" charset="0"/>
+              </a:rPr>
+              <a:t>Radiation Exposure</a:t>
+            </a:r>
+          </a:p>
+          <a:p>
+            <a:r>
+              <a:rPr lang="en-US" sz="1600" dirty="0">
+                <a:latin typeface="Calibri" panose="020F0502020204030204" pitchFamily="34" charset="0"/>
+                <a:ea typeface="Calibri" panose="020F0502020204030204" pitchFamily="34" charset="0"/>
+                <a:cs typeface="Calibri" panose="020F0502020204030204" pitchFamily="34" charset="0"/>
+              </a:rPr>
+              <a:t>Age, Family History</a:t>
+            </a:r>
+          </a:p>
+          <a:p>
+            <a:r>
+              <a:rPr lang="en-US" sz="1600" dirty="0">
+                <a:latin typeface="Calibri" panose="020F0502020204030204" pitchFamily="34" charset="0"/>
+                <a:ea typeface="Calibri" panose="020F0502020204030204" pitchFamily="34" charset="0"/>
+                <a:cs typeface="Calibri" panose="020F0502020204030204" pitchFamily="34" charset="0"/>
+              </a:rPr>
+              <a:t>Obesity</a:t>
+            </a:r>
+          </a:p>
+          <a:p>
+            <a:r>
+              <a:rPr lang="en-US" sz="1500" dirty="0">
+                <a:latin typeface="Calibri" panose="020F0502020204030204" pitchFamily="34" charset="0"/>
+                <a:ea typeface="Calibri" panose="020F0502020204030204" pitchFamily="34" charset="0"/>
+                <a:cs typeface="Calibri" panose="020F0502020204030204" pitchFamily="34" charset="0"/>
+              </a:rPr>
+              <a:t>A low-iodine diet</a:t>
+            </a:r>
+          </a:p>
+          <a:p>
+            <a:r>
+              <a:rPr lang="en-US" sz="1500" dirty="0">
+                <a:latin typeface="Calibri" panose="020F0502020204030204" pitchFamily="34" charset="0"/>
+                <a:ea typeface="Calibri" panose="020F0502020204030204" pitchFamily="34" charset="0"/>
+                <a:cs typeface="Calibri" panose="020F0502020204030204" pitchFamily="34" charset="0"/>
+              </a:rPr>
+              <a:t>Gender</a:t>
+            </a:r>
+          </a:p>
+          <a:p>
+            <a:endParaRPr lang="en-US" sz="1600" dirty="0">
+              <a:latin typeface="Calibri" panose="020F0502020204030204" pitchFamily="34" charset="0"/>
+              <a:ea typeface="Calibri" panose="020F0502020204030204" pitchFamily="34" charset="0"/>
+              <a:cs typeface="Calibri" panose="020F0502020204030204" pitchFamily="34" charset="0"/>
+            </a:endParaRPr>
+          </a:p>
+          <a:p>
+            <a:endParaRPr lang="en-US" sz="1600" dirty="0">
+              <a:latin typeface="Calibri" panose="020F0502020204030204" pitchFamily="34" charset="0"/>
+              <a:ea typeface="Calibri" panose="020F0502020204030204" pitchFamily="34" charset="0"/>
+              <a:cs typeface="Calibri" panose="020F0502020204030204" pitchFamily="34" charset="0"/>
+            </a:endParaRPr>
           </a:p>
         </p:txBody>
       </p:sp>
@@ -9353,165 +9630,6 @@
     <p:extLst>
       <p:ext uri="{BB962C8B-B14F-4D97-AF65-F5344CB8AC3E}">
         <p14:creationId xmlns:p14="http://schemas.microsoft.com/office/powerpoint/2010/main" val="156554742"/>
-      </p:ext>
-    </p:extLst>
-  </p:cSld>
-  <p:clrMapOvr>
-    <a:masterClrMapping/>
-  </p:clrMapOvr>
-</p:sld>
-</file>
-
-<file path=ppt/slides/slide2.xml><?xml version="1.0" encoding="utf-8"?>
-<p:sld xmlns:a="http://schemas.openxmlformats.org/drawingml/2006/main" xmlns:r="http://schemas.openxmlformats.org/officeDocument/2006/relationships" xmlns:p="http://schemas.openxmlformats.org/presentationml/2006/main">
-  <p:cSld>
-    <p:bg>
-      <p:bgPr>
-        <a:solidFill>
-          <a:schemeClr val="bg1"/>
-        </a:solidFill>
-        <a:effectLst/>
-      </p:bgPr>
-    </p:bg>
-    <p:spTree>
-      <p:nvGrpSpPr>
-        <p:cNvPr id="1" name=""/>
-        <p:cNvGrpSpPr/>
-        <p:nvPr/>
-      </p:nvGrpSpPr>
-      <p:grpSpPr>
-        <a:xfrm>
-          <a:off x="0" y="0"/>
-          <a:ext cx="0" cy="0"/>
-          <a:chOff x="0" y="0"/>
-          <a:chExt cx="0" cy="0"/>
-        </a:xfrm>
-      </p:grpSpPr>
-      <p:sp>
-        <p:nvSpPr>
-          <p:cNvPr id="2" name="Title 1">
-            <a:extLst>
-              <a:ext uri="{FF2B5EF4-FFF2-40B4-BE49-F238E27FC236}">
-                <a16:creationId xmlns:a16="http://schemas.microsoft.com/office/drawing/2014/main" id="{2D934CC8-D380-A21D-7849-4154F947F349}"/>
-              </a:ext>
-            </a:extLst>
-          </p:cNvPr>
-          <p:cNvSpPr>
-            <a:spLocks noGrp="1"/>
-          </p:cNvSpPr>
-          <p:nvPr>
-            <p:ph type="title"/>
-          </p:nvPr>
-        </p:nvSpPr>
-        <p:spPr>
-          <a:xfrm>
-            <a:off x="871442" y="685800"/>
-            <a:ext cx="4353116" cy="1474666"/>
-          </a:xfrm>
-        </p:spPr>
-        <p:txBody>
-          <a:bodyPr anchor="b">
-            <a:normAutofit fontScale="90000"/>
-          </a:bodyPr>
-          <a:lstStyle/>
-          <a:p>
-            <a:pPr algn="ctr"/>
-            <a:br>
-              <a:rPr lang="en-US" sz="3200">
-                <a:solidFill>
-                  <a:srgbClr val="595959"/>
-                </a:solidFill>
-              </a:rPr>
-            </a:br>
-            <a:br>
-              <a:rPr lang="en-US" sz="3200">
-                <a:solidFill>
-                  <a:srgbClr val="595959"/>
-                </a:solidFill>
-              </a:rPr>
-            </a:br>
-            <a:endParaRPr lang="en-US" sz="3200">
-              <a:solidFill>
-                <a:srgbClr val="595959"/>
-              </a:solidFill>
-            </a:endParaRPr>
-          </a:p>
-        </p:txBody>
-      </p:sp>
-      <p:graphicFrame>
-        <p:nvGraphicFramePr>
-          <p:cNvPr id="19" name="Content Placeholder 2">
-            <a:extLst>
-              <a:ext uri="{FF2B5EF4-FFF2-40B4-BE49-F238E27FC236}">
-                <a16:creationId xmlns:a16="http://schemas.microsoft.com/office/drawing/2014/main" id="{C0AC782E-24C0-542D-36C9-8F261BAE0AE9}"/>
-              </a:ext>
-            </a:extLst>
-          </p:cNvPr>
-          <p:cNvGraphicFramePr>
-            <a:graphicFrameLocks noGrp="1"/>
-          </p:cNvGraphicFramePr>
-          <p:nvPr>
-            <p:ph idx="1"/>
-            <p:extLst>
-              <p:ext uri="{D42A27DB-BD31-4B8C-83A1-F6EECF244321}">
-                <p14:modId xmlns:p14="http://schemas.microsoft.com/office/powerpoint/2010/main" val="4245354781"/>
-              </p:ext>
-            </p:extLst>
-          </p:nvPr>
-        </p:nvGraphicFramePr>
-        <p:xfrm>
-          <a:off x="468086" y="1110343"/>
-          <a:ext cx="5627914" cy="5627914"/>
-        </p:xfrm>
-        <a:graphic>
-          <a:graphicData uri="http://schemas.openxmlformats.org/drawingml/2006/diagram">
-            <dgm:relIds xmlns:dgm="http://schemas.openxmlformats.org/drawingml/2006/diagram" xmlns:r="http://schemas.openxmlformats.org/officeDocument/2006/relationships" r:dm="rId2" r:lo="rId3" r:qs="rId4" r:cs="rId5"/>
-          </a:graphicData>
-        </a:graphic>
-      </p:graphicFrame>
-      <p:pic>
-        <p:nvPicPr>
-          <p:cNvPr id="6" name="Graphic 5">
-            <a:extLst>
-              <a:ext uri="{FF2B5EF4-FFF2-40B4-BE49-F238E27FC236}">
-                <a16:creationId xmlns:a16="http://schemas.microsoft.com/office/drawing/2014/main" id="{AD0B169C-989B-1357-3734-87AA22B9CF12}"/>
-              </a:ext>
-            </a:extLst>
-          </p:cNvPr>
-          <p:cNvPicPr>
-            <a:picLocks noChangeAspect="1"/>
-          </p:cNvPicPr>
-          <p:nvPr/>
-        </p:nvPicPr>
-        <p:blipFill>
-          <a:blip>
-            <a:extLst>
-              <a:ext uri="{96DAC541-7B7A-43D3-8B79-37D633B846F1}">
-                <asvg:svgBlip xmlns:asvg="http://schemas.microsoft.com/office/drawing/2016/SVG/main" r:embed="rId7"/>
-              </a:ext>
-              <a:ext uri="{837473B0-CC2E-450A-ABE3-18F120FF3D39}">
-                <a1611:picAttrSrcUrl xmlns:a1611="http://schemas.microsoft.com/office/drawing/2016/11/main" r:id="rId8"/>
-              </a:ext>
-            </a:extLst>
-          </a:blip>
-          <a:stretch>
-            <a:fillRect/>
-          </a:stretch>
-        </p:blipFill>
-        <p:spPr>
-          <a:xfrm>
-            <a:off x="7308792" y="685799"/>
-            <a:ext cx="3743074" cy="5531972"/>
-          </a:xfrm>
-          <a:prstGeom prst="rect">
-            <a:avLst/>
-          </a:prstGeom>
-        </p:spPr>
-      </p:pic>
-    </p:spTree>
-    <p:extLst>
-      <p:ext uri="{BB962C8B-B14F-4D97-AF65-F5344CB8AC3E}">
-        <p14:creationId xmlns:p14="http://schemas.microsoft.com/office/powerpoint/2010/main" val="4232496392"/>
       </p:ext>
     </p:extLst>
   </p:cSld>
@@ -9646,8 +9764,8 @@
         </p:nvSpPr>
         <p:spPr>
           <a:xfrm>
-            <a:off x="4010826" y="299358"/>
-            <a:ext cx="6128656" cy="6259284"/>
+            <a:off x="3915233" y="190501"/>
+            <a:ext cx="6493888" cy="6166756"/>
           </a:xfrm>
         </p:spPr>
         <p:txBody>
@@ -9703,6 +9821,59 @@
             </a:r>
           </a:p>
           <a:p>
+            <a:r>
+              <a:rPr lang="en-US" sz="1600" dirty="0">
+                <a:latin typeface="Calibri" panose="020F0502020204030204" pitchFamily="34" charset="0"/>
+                <a:ea typeface="Calibri" panose="020F0502020204030204" pitchFamily="34" charset="0"/>
+                <a:cs typeface="Calibri" panose="020F0502020204030204" pitchFamily="34" charset="0"/>
+              </a:rPr>
+              <a:t>import pandas as pd</a:t>
+            </a:r>
+          </a:p>
+          <a:p>
+            <a:pPr>
+              <a:lnSpc>
+                <a:spcPct val="90000"/>
+              </a:lnSpc>
+            </a:pPr>
+            <a:r>
+              <a:rPr lang="en-US" sz="1600" dirty="0">
+                <a:latin typeface="Calibri" panose="020F0502020204030204" pitchFamily="34" charset="0"/>
+                <a:ea typeface="Calibri" panose="020F0502020204030204" pitchFamily="34" charset="0"/>
+                <a:cs typeface="Calibri" panose="020F0502020204030204" pitchFamily="34" charset="0"/>
+              </a:rPr>
+              <a:t>import seaborn as </a:t>
+            </a:r>
+            <a:r>
+              <a:rPr lang="en-US" sz="1600" dirty="0" err="1">
+                <a:latin typeface="Calibri" panose="020F0502020204030204" pitchFamily="34" charset="0"/>
+                <a:ea typeface="Calibri" panose="020F0502020204030204" pitchFamily="34" charset="0"/>
+                <a:cs typeface="Calibri" panose="020F0502020204030204" pitchFamily="34" charset="0"/>
+              </a:rPr>
+              <a:t>sns</a:t>
+            </a:r>
+            <a:endParaRPr lang="en-US" sz="1600" dirty="0">
+              <a:latin typeface="Calibri" panose="020F0502020204030204" pitchFamily="34" charset="0"/>
+              <a:ea typeface="Calibri" panose="020F0502020204030204" pitchFamily="34" charset="0"/>
+              <a:cs typeface="Calibri" panose="020F0502020204030204" pitchFamily="34" charset="0"/>
+            </a:endParaRPr>
+          </a:p>
+          <a:p>
+            <a:pPr>
+              <a:lnSpc>
+                <a:spcPct val="90000"/>
+              </a:lnSpc>
+            </a:pPr>
+            <a:r>
+              <a:rPr lang="en-US" sz="1600" dirty="0">
+                <a:latin typeface="Calibri" panose="020F0502020204030204" pitchFamily="34" charset="0"/>
+                <a:ea typeface="Calibri" panose="020F0502020204030204" pitchFamily="34" charset="0"/>
+                <a:cs typeface="Calibri" panose="020F0502020204030204" pitchFamily="34" charset="0"/>
+              </a:rPr>
+              <a:t>%matplotlib inline</a:t>
+            </a:r>
+          </a:p>
+          <a:p>
             <a:pPr>
               <a:lnSpc>
                 <a:spcPct val="90000"/>
@@ -9846,6 +10017,18 @@
               </a:rPr>
               <a:t>(f"{path}/thyroid_cancer_risk_data.csv")</a:t>
             </a:r>
+          </a:p>
+          <a:p>
+            <a:pPr>
+              <a:lnSpc>
+                <a:spcPct val="90000"/>
+              </a:lnSpc>
+            </a:pPr>
+            <a:endParaRPr lang="en-US" sz="1600" dirty="0">
+              <a:latin typeface="Calibri" panose="020F0502020204030204" pitchFamily="34" charset="0"/>
+              <a:ea typeface="Calibri" panose="020F0502020204030204" pitchFamily="34" charset="0"/>
+              <a:cs typeface="Calibri" panose="020F0502020204030204" pitchFamily="34" charset="0"/>
+            </a:endParaRPr>
           </a:p>
           <a:p>
             <a:pPr>
@@ -9949,23 +10132,7 @@
                 <a:ea typeface="Calibri" panose="020F0502020204030204" pitchFamily="34" charset="0"/>
                 <a:cs typeface="Calibri" panose="020F0502020204030204" pitchFamily="34" charset="0"/>
               </a:rPr>
-              <a:t> by dropping any rows with missing values and </a:t>
-            </a:r>
-            <a:r>
-              <a:rPr lang="en-US" sz="1600">
-                <a:latin typeface="Calibri" panose="020F0502020204030204" pitchFamily="34" charset="0"/>
-                <a:ea typeface="Calibri" panose="020F0502020204030204" pitchFamily="34" charset="0"/>
-                <a:cs typeface="Calibri" panose="020F0502020204030204" pitchFamily="34" charset="0"/>
-              </a:rPr>
-              <a:t>duplicated values, </a:t>
-            </a:r>
-            <a:r>
-              <a:rPr lang="en-US" sz="1600" dirty="0">
-                <a:latin typeface="Calibri" panose="020F0502020204030204" pitchFamily="34" charset="0"/>
-                <a:ea typeface="Calibri" panose="020F0502020204030204" pitchFamily="34" charset="0"/>
-                <a:cs typeface="Calibri" panose="020F0502020204030204" pitchFamily="34" charset="0"/>
-              </a:rPr>
-              <a:t>then group the data by the analysis columns </a:t>
+              <a:t> by dropping any rows with missing values and duplicated values, then group the data by the analysis columns </a:t>
             </a:r>
           </a:p>
           <a:p>
@@ -10004,6 +10171,364 @@
 </file>
 
 <file path=ppt/slides/slide4.xml><?xml version="1.0" encoding="utf-8"?>
+<p:sld xmlns:a="http://schemas.openxmlformats.org/drawingml/2006/main" xmlns:r="http://schemas.openxmlformats.org/officeDocument/2006/relationships" xmlns:p="http://schemas.openxmlformats.org/presentationml/2006/main">
+  <p:cSld>
+    <p:spTree>
+      <p:nvGrpSpPr>
+        <p:cNvPr id="1" name=""/>
+        <p:cNvGrpSpPr/>
+        <p:nvPr/>
+      </p:nvGrpSpPr>
+      <p:grpSpPr>
+        <a:xfrm>
+          <a:off x="0" y="0"/>
+          <a:ext cx="0" cy="0"/>
+          <a:chOff x="0" y="0"/>
+          <a:chExt cx="0" cy="0"/>
+        </a:xfrm>
+      </p:grpSpPr>
+      <p:sp>
+        <p:nvSpPr>
+          <p:cNvPr id="2" name="Title 1">
+            <a:extLst>
+              <a:ext uri="{FF2B5EF4-FFF2-40B4-BE49-F238E27FC236}">
+                <a16:creationId xmlns:a16="http://schemas.microsoft.com/office/drawing/2014/main" id="{15268FD2-EDE1-C5D9-53B7-6B385E5C56D4}"/>
+              </a:ext>
+            </a:extLst>
+          </p:cNvPr>
+          <p:cNvSpPr>
+            <a:spLocks noGrp="1"/>
+          </p:cNvSpPr>
+          <p:nvPr>
+            <p:ph type="title"/>
+          </p:nvPr>
+        </p:nvSpPr>
+        <p:spPr>
+          <a:xfrm>
+            <a:off x="854777" y="53651"/>
+            <a:ext cx="8775485" cy="2423369"/>
+          </a:xfrm>
+        </p:spPr>
+        <p:txBody>
+          <a:bodyPr>
+            <a:normAutofit fontScale="90000"/>
+          </a:bodyPr>
+          <a:lstStyle/>
+          <a:p>
+            <a:r>
+              <a:rPr lang="en-US" dirty="0">
+                <a:latin typeface="Calibri" panose="020F0502020204030204" pitchFamily="34" charset="0"/>
+                <a:ea typeface="Calibri" panose="020F0502020204030204" pitchFamily="34" charset="0"/>
+                <a:cs typeface="Calibri" panose="020F0502020204030204" pitchFamily="34" charset="0"/>
+              </a:rPr>
+              <a:t>The motivation for me to perform analysis on the thyroid cancer is because I want to know what cause thyroid cancer.  </a:t>
+            </a:r>
+            <a:br>
+              <a:rPr lang="en-US" dirty="0">
+                <a:latin typeface="Calibri" panose="020F0502020204030204" pitchFamily="34" charset="0"/>
+                <a:ea typeface="Calibri" panose="020F0502020204030204" pitchFamily="34" charset="0"/>
+                <a:cs typeface="Calibri" panose="020F0502020204030204" pitchFamily="34" charset="0"/>
+              </a:rPr>
+            </a:br>
+            <a:r>
+              <a:rPr lang="en-US" dirty="0">
+                <a:latin typeface="Calibri" panose="020F0502020204030204" pitchFamily="34" charset="0"/>
+                <a:ea typeface="Calibri" panose="020F0502020204030204" pitchFamily="34" charset="0"/>
+                <a:cs typeface="Calibri" panose="020F0502020204030204" pitchFamily="34" charset="0"/>
+              </a:rPr>
+              <a:t>I never heard of thyroid cancer until I had it.</a:t>
+            </a:r>
+            <a:br>
+              <a:rPr lang="en-US" dirty="0">
+                <a:latin typeface="Calibri" panose="020F0502020204030204" pitchFamily="34" charset="0"/>
+                <a:ea typeface="Calibri" panose="020F0502020204030204" pitchFamily="34" charset="0"/>
+                <a:cs typeface="Calibri" panose="020F0502020204030204" pitchFamily="34" charset="0"/>
+              </a:rPr>
+            </a:br>
+            <a:br>
+              <a:rPr lang="en-US" dirty="0"/>
+            </a:br>
+            <a:br>
+              <a:rPr lang="en-US" dirty="0"/>
+            </a:br>
+            <a:br>
+              <a:rPr lang="en-US" dirty="0"/>
+            </a:br>
+            <a:br>
+              <a:rPr lang="en-US" dirty="0"/>
+            </a:br>
+            <a:endParaRPr lang="en-US" dirty="0"/>
+          </a:p>
+        </p:txBody>
+      </p:sp>
+      <p:sp>
+        <p:nvSpPr>
+          <p:cNvPr id="3" name="Content Placeholder 2">
+            <a:extLst>
+              <a:ext uri="{FF2B5EF4-FFF2-40B4-BE49-F238E27FC236}">
+                <a16:creationId xmlns:a16="http://schemas.microsoft.com/office/drawing/2014/main" id="{574EB1DF-1398-B509-8789-8D0E9F05A61B}"/>
+              </a:ext>
+            </a:extLst>
+          </p:cNvPr>
+          <p:cNvSpPr>
+            <a:spLocks noGrp="1"/>
+          </p:cNvSpPr>
+          <p:nvPr>
+            <p:ph idx="1"/>
+          </p:nvPr>
+        </p:nvSpPr>
+        <p:spPr>
+          <a:xfrm>
+            <a:off x="239486" y="2132954"/>
+            <a:ext cx="7841052" cy="4414283"/>
+          </a:xfrm>
+        </p:spPr>
+        <p:txBody>
+          <a:bodyPr>
+            <a:noAutofit/>
+          </a:bodyPr>
+          <a:lstStyle/>
+          <a:p>
+            <a:endParaRPr lang="en-US" sz="1200" dirty="0"/>
+          </a:p>
+          <a:p>
+            <a:r>
+              <a:rPr lang="en-US" sz="1400" b="1" dirty="0">
+                <a:latin typeface="Calibri" panose="020F0502020204030204" pitchFamily="34" charset="0"/>
+                <a:ea typeface="Calibri" panose="020F0502020204030204" pitchFamily="34" charset="0"/>
+                <a:cs typeface="Calibri" panose="020F0502020204030204" pitchFamily="34" charset="0"/>
+              </a:rPr>
+              <a:t>How common is thyroid cancer?</a:t>
+            </a:r>
+          </a:p>
+          <a:p>
+            <a:r>
+              <a:rPr lang="en-US" sz="1200" dirty="0">
+                <a:latin typeface="Calibri" panose="020F0502020204030204" pitchFamily="34" charset="0"/>
+                <a:ea typeface="Calibri" panose="020F0502020204030204" pitchFamily="34" charset="0"/>
+                <a:cs typeface="Calibri" panose="020F0502020204030204" pitchFamily="34" charset="0"/>
+              </a:rPr>
+              <a:t>The American Cancer Society’s most recent estimates for thyroid cancer in the United States are for 2026:</a:t>
+            </a:r>
+          </a:p>
+          <a:p>
+            <a:r>
+              <a:rPr lang="en-US" sz="1200" dirty="0">
+                <a:latin typeface="Calibri" panose="020F0502020204030204" pitchFamily="34" charset="0"/>
+                <a:ea typeface="Calibri" panose="020F0502020204030204" pitchFamily="34" charset="0"/>
+                <a:cs typeface="Calibri" panose="020F0502020204030204" pitchFamily="34" charset="0"/>
+              </a:rPr>
+              <a:t>About 45,240 new cases of thyroid cancer (13,240 in men and 32,000 in women)</a:t>
+            </a:r>
+          </a:p>
+          <a:p>
+            <a:r>
+              <a:rPr lang="en-US" sz="1200" dirty="0">
+                <a:latin typeface="Calibri" panose="020F0502020204030204" pitchFamily="34" charset="0"/>
+                <a:ea typeface="Calibri" panose="020F0502020204030204" pitchFamily="34" charset="0"/>
+                <a:cs typeface="Calibri" panose="020F0502020204030204" pitchFamily="34" charset="0"/>
+              </a:rPr>
+              <a:t>About 2,320 deaths from thyroid cancer (1,100 in men and 1,220 in women)</a:t>
+            </a:r>
+          </a:p>
+          <a:p>
+            <a:r>
+              <a:rPr lang="en-US" sz="1200" dirty="0">
+                <a:latin typeface="Calibri" panose="020F0502020204030204" pitchFamily="34" charset="0"/>
+                <a:ea typeface="Calibri" panose="020F0502020204030204" pitchFamily="34" charset="0"/>
+                <a:cs typeface="Calibri" panose="020F0502020204030204" pitchFamily="34" charset="0"/>
+              </a:rPr>
+              <a:t>Thyroid cancer is often diagnosed at a younger age than most other adult cancers. The average age when a person is diagnosed with thyroid cancer is 51.</a:t>
+            </a:r>
+          </a:p>
+          <a:p>
+            <a:r>
+              <a:rPr lang="en-US" sz="1200" dirty="0">
+                <a:latin typeface="Calibri" panose="020F0502020204030204" pitchFamily="34" charset="0"/>
+                <a:ea typeface="Calibri" panose="020F0502020204030204" pitchFamily="34" charset="0"/>
+                <a:cs typeface="Calibri" panose="020F0502020204030204" pitchFamily="34" charset="0"/>
+              </a:rPr>
+              <a:t>This cancer is almost 3 times more common in women than in men. It is about 40% to 50% less common in Black people than in any other racial or ethnic group.</a:t>
+            </a:r>
+          </a:p>
+          <a:p>
+            <a:r>
+              <a:rPr lang="en-US" sz="1400" b="1" dirty="0">
+                <a:latin typeface="Calibri" panose="020F0502020204030204" pitchFamily="34" charset="0"/>
+                <a:ea typeface="Calibri" panose="020F0502020204030204" pitchFamily="34" charset="0"/>
+                <a:cs typeface="Calibri" panose="020F0502020204030204" pitchFamily="34" charset="0"/>
+              </a:rPr>
+              <a:t>Trends in thyroid cancer statistics</a:t>
+            </a:r>
+          </a:p>
+          <a:p>
+            <a:r>
+              <a:rPr lang="en-US" sz="1200" dirty="0">
+                <a:latin typeface="Calibri" panose="020F0502020204030204" pitchFamily="34" charset="0"/>
+                <a:ea typeface="Calibri" panose="020F0502020204030204" pitchFamily="34" charset="0"/>
+                <a:cs typeface="Calibri" panose="020F0502020204030204" pitchFamily="34" charset="0"/>
+              </a:rPr>
+              <a:t>Until recently, the rate of new thyroid cancers was growing faster than for any other cancer in the US.</a:t>
+            </a:r>
+          </a:p>
+          <a:p>
+            <a:r>
+              <a:rPr lang="en-US" sz="1200" dirty="0">
+                <a:latin typeface="Calibri" panose="020F0502020204030204" pitchFamily="34" charset="0"/>
+                <a:ea typeface="Calibri" panose="020F0502020204030204" pitchFamily="34" charset="0"/>
+                <a:cs typeface="Calibri" panose="020F0502020204030204" pitchFamily="34" charset="0"/>
+              </a:rPr>
+              <a:t>This was largely because more thyroid tumors were being found during imaging tests such as CT or MRI scans that were done for other medical problems. These sensitive tests can sometimes detect small thyroid tumors that might not ever have been found otherwise (and many of which might never have caused any problems).</a:t>
+            </a:r>
+          </a:p>
+          <a:p>
+            <a:r>
+              <a:rPr lang="en-US" sz="1200" dirty="0">
+                <a:latin typeface="Calibri" panose="020F0502020204030204" pitchFamily="34" charset="0"/>
+                <a:ea typeface="Calibri" panose="020F0502020204030204" pitchFamily="34" charset="0"/>
+                <a:cs typeface="Calibri" panose="020F0502020204030204" pitchFamily="34" charset="0"/>
+              </a:rPr>
+              <a:t>However, as doctors have started to use stricter criteria for diagnosing thyroid cancer, the incidence rate declined by 1.4% per year from 2013 through 2022.</a:t>
+            </a:r>
+          </a:p>
+          <a:p>
+            <a:r>
+              <a:rPr lang="en-US" sz="1200" dirty="0">
+                <a:latin typeface="Calibri" panose="020F0502020204030204" pitchFamily="34" charset="0"/>
+                <a:ea typeface="Calibri" panose="020F0502020204030204" pitchFamily="34" charset="0"/>
+                <a:cs typeface="Calibri" panose="020F0502020204030204" pitchFamily="34" charset="0"/>
+              </a:rPr>
+              <a:t>The death rate for thyroid cancer has stayed about the same since 2009.</a:t>
+            </a:r>
+          </a:p>
+          <a:p>
+            <a:pPr marL="0" indent="0">
+              <a:buNone/>
+            </a:pPr>
+            <a:endParaRPr lang="en-US" sz="1200" dirty="0"/>
+          </a:p>
+        </p:txBody>
+      </p:sp>
+      <p:pic>
+        <p:nvPicPr>
+          <p:cNvPr id="5" name="Picture 4">
+            <a:extLst>
+              <a:ext uri="{FF2B5EF4-FFF2-40B4-BE49-F238E27FC236}">
+                <a16:creationId xmlns:a16="http://schemas.microsoft.com/office/drawing/2014/main" id="{5342CD38-5956-7477-8BC1-BBAD4E925D92}"/>
+              </a:ext>
+            </a:extLst>
+          </p:cNvPr>
+          <p:cNvPicPr>
+            <a:picLocks noChangeAspect="1"/>
+          </p:cNvPicPr>
+          <p:nvPr/>
+        </p:nvPicPr>
+        <p:blipFill>
+          <a:blip r:embed="rId2"/>
+          <a:stretch>
+            <a:fillRect/>
+          </a:stretch>
+        </p:blipFill>
+        <p:spPr>
+          <a:xfrm>
+            <a:off x="7982566" y="3243943"/>
+            <a:ext cx="2602458" cy="1860695"/>
+          </a:xfrm>
+          <a:prstGeom prst="rect">
+            <a:avLst/>
+          </a:prstGeom>
+        </p:spPr>
+      </p:pic>
+      <p:pic>
+        <p:nvPicPr>
+          <p:cNvPr id="11" name="Picture 10">
+            <a:extLst>
+              <a:ext uri="{FF2B5EF4-FFF2-40B4-BE49-F238E27FC236}">
+                <a16:creationId xmlns:a16="http://schemas.microsoft.com/office/drawing/2014/main" id="{F2E32E82-62B1-3336-F067-7FC02AA9994B}"/>
+              </a:ext>
+            </a:extLst>
+          </p:cNvPr>
+          <p:cNvPicPr>
+            <a:picLocks noChangeAspect="1"/>
+          </p:cNvPicPr>
+          <p:nvPr/>
+        </p:nvPicPr>
+        <p:blipFill>
+          <a:blip r:embed="rId3"/>
+          <a:stretch>
+            <a:fillRect/>
+          </a:stretch>
+        </p:blipFill>
+        <p:spPr>
+          <a:xfrm>
+            <a:off x="10977661" y="6299911"/>
+            <a:ext cx="974853" cy="494652"/>
+          </a:xfrm>
+          <a:prstGeom prst="rect">
+            <a:avLst/>
+          </a:prstGeom>
+        </p:spPr>
+      </p:pic>
+      <p:sp>
+        <p:nvSpPr>
+          <p:cNvPr id="13" name="TextBox 12">
+            <a:extLst>
+              <a:ext uri="{FF2B5EF4-FFF2-40B4-BE49-F238E27FC236}">
+                <a16:creationId xmlns:a16="http://schemas.microsoft.com/office/drawing/2014/main" id="{BBC4CAB3-F003-DFAE-AA7E-9DFDB4669D56}"/>
+              </a:ext>
+            </a:extLst>
+          </p:cNvPr>
+          <p:cNvSpPr txBox="1"/>
+          <p:nvPr/>
+        </p:nvSpPr>
+        <p:spPr>
+          <a:xfrm>
+            <a:off x="9630262" y="6496572"/>
+            <a:ext cx="1347399" cy="307777"/>
+          </a:xfrm>
+          <a:prstGeom prst="rect">
+            <a:avLst/>
+          </a:prstGeom>
+          <a:noFill/>
+        </p:spPr>
+        <p:txBody>
+          <a:bodyPr wrap="square">
+            <a:spAutoFit/>
+          </a:bodyPr>
+          <a:lstStyle/>
+          <a:p>
+            <a:pPr algn="l">
+              <a:buNone/>
+            </a:pPr>
+            <a:r>
+              <a:rPr lang="en-US" sz="1400" i="0" dirty="0">
+                <a:solidFill>
+                  <a:srgbClr val="1A1A1A"/>
+                </a:solidFill>
+                <a:effectLst/>
+                <a:latin typeface="Calibri" panose="020F0502020204030204" pitchFamily="34" charset="0"/>
+                <a:ea typeface="Calibri" panose="020F0502020204030204" pitchFamily="34" charset="0"/>
+                <a:cs typeface="Calibri" panose="020F0502020204030204" pitchFamily="34" charset="0"/>
+              </a:rPr>
+              <a:t>Statement from </a:t>
+            </a:r>
+          </a:p>
+        </p:txBody>
+      </p:sp>
+    </p:spTree>
+    <p:extLst>
+      <p:ext uri="{BB962C8B-B14F-4D97-AF65-F5344CB8AC3E}">
+        <p14:creationId xmlns:p14="http://schemas.microsoft.com/office/powerpoint/2010/main" val="522361943"/>
+      </p:ext>
+    </p:extLst>
+  </p:cSld>
+  <p:clrMapOvr>
+    <a:masterClrMapping/>
+  </p:clrMapOvr>
+</p:sld>
+</file>
+
+<file path=ppt/slides/slide5.xml><?xml version="1.0" encoding="utf-8"?>
 <p:sld xmlns:a="http://schemas.openxmlformats.org/drawingml/2006/main" xmlns:r="http://schemas.openxmlformats.org/officeDocument/2006/relationships" xmlns:p="http://schemas.openxmlformats.org/presentationml/2006/main">
   <p:cSld>
     <p:bg>
@@ -10052,14 +10577,74 @@
         </p:blipFill>
         <p:spPr>
           <a:xfrm>
-            <a:off x="511630" y="259869"/>
-            <a:ext cx="11377298" cy="6456617"/>
+            <a:off x="293916" y="108857"/>
+            <a:ext cx="9821120" cy="5573486"/>
           </a:xfrm>
           <a:prstGeom prst="rect">
             <a:avLst/>
           </a:prstGeom>
         </p:spPr>
       </p:pic>
+      <p:sp>
+        <p:nvSpPr>
+          <p:cNvPr id="3" name="TextBox 2">
+            <a:extLst>
+              <a:ext uri="{FF2B5EF4-FFF2-40B4-BE49-F238E27FC236}">
+                <a16:creationId xmlns:a16="http://schemas.microsoft.com/office/drawing/2014/main" id="{7705EEBD-6C2C-CC11-B71C-FE131A96507F}"/>
+              </a:ext>
+            </a:extLst>
+          </p:cNvPr>
+          <p:cNvSpPr txBox="1"/>
+          <p:nvPr/>
+        </p:nvSpPr>
+        <p:spPr>
+          <a:xfrm>
+            <a:off x="1025979" y="5893454"/>
+            <a:ext cx="7018564" cy="467436"/>
+          </a:xfrm>
+          <a:prstGeom prst="rect">
+            <a:avLst/>
+          </a:prstGeom>
+          <a:noFill/>
+        </p:spPr>
+        <p:txBody>
+          <a:bodyPr wrap="square">
+            <a:spAutoFit/>
+          </a:bodyPr>
+          <a:lstStyle/>
+          <a:p>
+            <a:pPr>
+              <a:lnSpc>
+                <a:spcPts val="1425"/>
+              </a:lnSpc>
+              <a:buNone/>
+            </a:pPr>
+            <a:r>
+              <a:rPr lang="en-US" dirty="0">
+                <a:solidFill>
+                  <a:srgbClr val="000000"/>
+                </a:solidFill>
+                <a:latin typeface="Calibri" panose="020F0502020204030204" pitchFamily="34" charset="0"/>
+                <a:ea typeface="Calibri" panose="020F0502020204030204" pitchFamily="34" charset="0"/>
+                <a:cs typeface="Calibri" panose="020F0502020204030204" pitchFamily="34" charset="0"/>
+              </a:rPr>
+              <a:t>Analyze which t</a:t>
+            </a:r>
+            <a:r>
+              <a:rPr lang="en-US" b="0" dirty="0">
+                <a:solidFill>
+                  <a:srgbClr val="000000"/>
+                </a:solidFill>
+                <a:effectLst/>
+                <a:latin typeface="Calibri" panose="020F0502020204030204" pitchFamily="34" charset="0"/>
+                <a:ea typeface="Calibri" panose="020F0502020204030204" pitchFamily="34" charset="0"/>
+                <a:cs typeface="Calibri" panose="020F0502020204030204" pitchFamily="34" charset="0"/>
+              </a:rPr>
+              <a:t>hyroid cancer risk factors that has the highest risk that led to thyroid cancer, Family history and Radiation exposure </a:t>
+            </a:r>
+          </a:p>
+        </p:txBody>
+      </p:sp>
     </p:spTree>
     <p:extLst>
       <p:ext uri="{BB962C8B-B14F-4D97-AF65-F5344CB8AC3E}">
@@ -10073,7 +10658,7 @@
 </p:sld>
 </file>
 
-<file path=ppt/slides/slide5.xml><?xml version="1.0" encoding="utf-8"?>
+<file path=ppt/slides/slide6.xml><?xml version="1.0" encoding="utf-8"?>
 <p:sld xmlns:a="http://schemas.openxmlformats.org/drawingml/2006/main" xmlns:r="http://schemas.openxmlformats.org/officeDocument/2006/relationships" xmlns:p="http://schemas.openxmlformats.org/presentationml/2006/main">
   <p:cSld>
     <p:bg>
@@ -11698,7 +12283,7 @@
         </p:blipFill>
         <p:spPr>
           <a:xfrm>
-            <a:off x="530362" y="1232367"/>
+            <a:off x="490045" y="1338343"/>
             <a:ext cx="5664570" cy="4885691"/>
           </a:xfrm>
           <a:prstGeom prst="rect">
@@ -11776,7 +12361,7 @@
         </p:blipFill>
         <p:spPr>
           <a:xfrm>
-            <a:off x="6081305" y="1232367"/>
+            <a:off x="5995099" y="1338343"/>
             <a:ext cx="5604531" cy="4885691"/>
           </a:xfrm>
           <a:prstGeom prst="rect">
@@ -11784,6 +12369,77 @@
           </a:prstGeom>
         </p:spPr>
       </p:pic>
+      <p:sp>
+        <p:nvSpPr>
+          <p:cNvPr id="3" name="TextBox 2">
+            <a:extLst>
+              <a:ext uri="{FF2B5EF4-FFF2-40B4-BE49-F238E27FC236}">
+                <a16:creationId xmlns:a16="http://schemas.microsoft.com/office/drawing/2014/main" id="{40E665E4-FFCF-BF1C-4C89-8F1AB5733181}"/>
+              </a:ext>
+            </a:extLst>
+          </p:cNvPr>
+          <p:cNvSpPr txBox="1"/>
+          <p:nvPr/>
+        </p:nvSpPr>
+        <p:spPr>
+          <a:xfrm>
+            <a:off x="2432390" y="480060"/>
+            <a:ext cx="6101442" cy="646331"/>
+          </a:xfrm>
+          <a:prstGeom prst="rect">
+            <a:avLst/>
+          </a:prstGeom>
+          <a:noFill/>
+        </p:spPr>
+        <p:txBody>
+          <a:bodyPr wrap="square">
+            <a:spAutoFit/>
+          </a:bodyPr>
+          <a:lstStyle/>
+          <a:p>
+            <a:r>
+              <a:rPr lang="en-US" sz="1800" dirty="0">
+                <a:latin typeface="Calibri" panose="020F0502020204030204" pitchFamily="34" charset="0"/>
+                <a:ea typeface="Calibri" panose="020F0502020204030204" pitchFamily="34" charset="0"/>
+                <a:cs typeface="Calibri" panose="020F0502020204030204" pitchFamily="34" charset="0"/>
+              </a:rPr>
+              <a:t>Ethnicity and age group that has the highest developing thyroid cancer is </a:t>
+            </a:r>
+            <a:r>
+              <a:rPr lang="en-US" sz="1800" b="1" dirty="0">
+                <a:latin typeface="Calibri" panose="020F0502020204030204" pitchFamily="34" charset="0"/>
+                <a:ea typeface="Calibri" panose="020F0502020204030204" pitchFamily="34" charset="0"/>
+                <a:cs typeface="Calibri" panose="020F0502020204030204" pitchFamily="34" charset="0"/>
+              </a:rPr>
+              <a:t>Asian</a:t>
+            </a:r>
+            <a:r>
+              <a:rPr lang="en-US" sz="1800" dirty="0">
+                <a:latin typeface="Calibri" panose="020F0502020204030204" pitchFamily="34" charset="0"/>
+                <a:ea typeface="Calibri" panose="020F0502020204030204" pitchFamily="34" charset="0"/>
+                <a:cs typeface="Calibri" panose="020F0502020204030204" pitchFamily="34" charset="0"/>
+              </a:rPr>
+              <a:t> and age between </a:t>
+            </a:r>
+            <a:r>
+              <a:rPr lang="en-US" sz="1800" b="1" dirty="0">
+                <a:latin typeface="Calibri" panose="020F0502020204030204" pitchFamily="34" charset="0"/>
+                <a:ea typeface="Calibri" panose="020F0502020204030204" pitchFamily="34" charset="0"/>
+                <a:cs typeface="Calibri" panose="020F0502020204030204" pitchFamily="34" charset="0"/>
+              </a:rPr>
+              <a:t>20 to 60</a:t>
+            </a:r>
+            <a:r>
+              <a:rPr lang="en-US" sz="1800" dirty="0">
+                <a:latin typeface="Calibri" panose="020F0502020204030204" pitchFamily="34" charset="0"/>
+                <a:ea typeface="Calibri" panose="020F0502020204030204" pitchFamily="34" charset="0"/>
+                <a:cs typeface="Calibri" panose="020F0502020204030204" pitchFamily="34" charset="0"/>
+              </a:rPr>
+              <a:t>.</a:t>
+            </a:r>
+          </a:p>
+        </p:txBody>
+      </p:sp>
     </p:spTree>
     <p:extLst>
       <p:ext uri="{BB962C8B-B14F-4D97-AF65-F5344CB8AC3E}">
@@ -11797,7 +12453,7 @@
 </p:sld>
 </file>
 
-<file path=ppt/slides/slide6.xml><?xml version="1.0" encoding="utf-8"?>
+<file path=ppt/slides/slide7.xml><?xml version="1.0" encoding="utf-8"?>
 <p:sld xmlns:a="http://schemas.openxmlformats.org/drawingml/2006/main" xmlns:r="http://schemas.openxmlformats.org/officeDocument/2006/relationships" xmlns:p="http://schemas.openxmlformats.org/presentationml/2006/main">
   <p:cSld>
     <p:bg>
@@ -11870,15 +12526,41 @@
         </p:nvSpPr>
         <p:spPr>
           <a:xfrm>
-            <a:off x="7061942" y="424542"/>
+            <a:off x="6659171" y="380999"/>
             <a:ext cx="2811401" cy="5072743"/>
           </a:xfrm>
         </p:spPr>
         <p:txBody>
           <a:bodyPr>
-            <a:normAutofit/>
+            <a:normAutofit fontScale="92500"/>
           </a:bodyPr>
           <a:lstStyle/>
+          <a:p>
+            <a:r>
+              <a:rPr lang="en-US" sz="2000" dirty="0">
+                <a:solidFill>
+                  <a:schemeClr val="tx2"/>
+                </a:solidFill>
+                <a:latin typeface="Calibri" panose="020F0502020204030204" pitchFamily="34" charset="0"/>
+                <a:ea typeface="Calibri" panose="020F0502020204030204" pitchFamily="34" charset="0"/>
+                <a:cs typeface="Calibri" panose="020F0502020204030204" pitchFamily="34" charset="0"/>
+              </a:rPr>
+              <a:t>Female have the highest percentage to develop thyroid cancer</a:t>
+            </a:r>
+          </a:p>
+          <a:p>
+            <a:pPr marL="0" indent="0">
+              <a:buNone/>
+            </a:pPr>
+            <a:endParaRPr lang="en-US" sz="2000" dirty="0">
+              <a:solidFill>
+                <a:schemeClr val="tx2"/>
+              </a:solidFill>
+              <a:latin typeface="Calibri" panose="020F0502020204030204" pitchFamily="34" charset="0"/>
+              <a:ea typeface="Calibri" panose="020F0502020204030204" pitchFamily="34" charset="0"/>
+              <a:cs typeface="Calibri" panose="020F0502020204030204" pitchFamily="34" charset="0"/>
+            </a:endParaRPr>
+          </a:p>
           <a:p>
             <a:r>
               <a:rPr lang="en-US" sz="2000" dirty="0">
@@ -11891,18 +12573,13 @@
               </a:rPr>
               <a:t>Women are about three times more likely than men to develop thyroid cancer.</a:t>
             </a:r>
-            <a:endParaRPr lang="en-US" sz="2000" dirty="0">
-              <a:hlinkClick r:id="rId3"/>
-            </a:endParaRPr>
-          </a:p>
-          <a:p>
-            <a:endParaRPr lang="en-US" dirty="0">
-              <a:hlinkClick r:id="rId3"/>
-            </a:endParaRPr>
-          </a:p>
-          <a:p>
-            <a:r>
-              <a:rPr lang="en-US" sz="1200" dirty="0">
+          </a:p>
+          <a:p>
+            <a:r>
+              <a:rPr lang="en-US" sz="1000" dirty="0">
+                <a:latin typeface="Calibri" panose="020F0502020204030204" pitchFamily="34" charset="0"/>
+                <a:ea typeface="Calibri" panose="020F0502020204030204" pitchFamily="34" charset="0"/>
+                <a:cs typeface="Calibri" panose="020F0502020204030204" pitchFamily="34" charset="0"/>
                 <a:hlinkClick r:id="rId3"/>
               </a:rPr>
               <a:t>https://www.cancer.org/</a:t>
@@ -11939,7 +12616,7 @@
               <a:rPr lang="en-US" dirty="0"/>
             </a:br>
             <a:r>
-              <a:rPr lang="en-US" sz="1100" dirty="0">
+              <a:rPr lang="en-US" sz="1000" dirty="0">
                 <a:latin typeface="Calibri" panose="020F0502020204030204" pitchFamily="34" charset="0"/>
                 <a:ea typeface="Calibri" panose="020F0502020204030204" pitchFamily="34" charset="0"/>
                 <a:cs typeface="Calibri" panose="020F0502020204030204" pitchFamily="34" charset="0"/>
@@ -11947,7 +12624,7 @@
               </a:rPr>
               <a:t>Thyroid Cancer Risks and Prevention - Brigham and Women's Hospital</a:t>
             </a:r>
-            <a:endParaRPr lang="en-US" sz="1100" dirty="0">
+            <a:endParaRPr lang="en-US" sz="1000" dirty="0">
               <a:latin typeface="Calibri" panose="020F0502020204030204" pitchFamily="34" charset="0"/>
               <a:ea typeface="Calibri" panose="020F0502020204030204" pitchFamily="34" charset="0"/>
               <a:cs typeface="Calibri" panose="020F0502020204030204" pitchFamily="34" charset="0"/>
@@ -12051,7 +12728,7 @@
 </p:sld>
 </file>
 
-<file path=ppt/slides/slide7.xml><?xml version="1.0" encoding="utf-8"?>
+<file path=ppt/slides/slide8.xml><?xml version="1.0" encoding="utf-8"?>
 <p:sld xmlns:a="http://schemas.openxmlformats.org/drawingml/2006/main" xmlns:r="http://schemas.openxmlformats.org/officeDocument/2006/relationships" xmlns:p="http://schemas.openxmlformats.org/presentationml/2006/main">
   <p:cSld>
     <p:bg>
@@ -12313,7 +12990,7 @@
 </p:sld>
 </file>
 
-<file path=ppt/slides/slide8.xml><?xml version="1.0" encoding="utf-8"?>
+<file path=ppt/slides/slide9.xml><?xml version="1.0" encoding="utf-8"?>
 <p:sld xmlns:a="http://schemas.openxmlformats.org/drawingml/2006/main" xmlns:r="http://schemas.openxmlformats.org/officeDocument/2006/relationships" xmlns:p="http://schemas.openxmlformats.org/presentationml/2006/main">
   <p:cSld>
     <p:spTree>
@@ -12346,7 +13023,12 @@
             <p:ph type="title"/>
           </p:nvPr>
         </p:nvSpPr>
-        <p:spPr/>
+        <p:spPr>
+          <a:xfrm>
+            <a:off x="699105" y="206828"/>
+            <a:ext cx="8596668" cy="1320800"/>
+          </a:xfrm>
+        </p:spPr>
         <p:txBody>
           <a:bodyPr/>
           <a:lstStyle/>
